--- a/assets/pptx/catalog-492.pptx
+++ b/assets/pptx/catalog-492.pptx
@@ -3274,7 +3274,7 @@
                 <a:ea typeface="Ebrima"/>
                 <a:cs typeface="Ebrima"/>
               </a:rPr>
-              <a:t>ህይወት ማለት (2) አንተ ነህ</a:t>
+              <a:t>ህይወት ማለት 2 አንተ ነህ</a:t>
             </a:r>
           </a:p>
         </p:txBody>
@@ -3462,7 +3462,7 @@
                 <a:ea typeface="Ebrima"/>
                 <a:cs typeface="Ebrima"/>
               </a:rPr>
-              <a:t>ለእኔ ብርቄ ድንቄ ነህ (ወይ×6)</a:t>
+              <a:t>ለእኔ ብርቄ ድንቄ ነህ ወይ×6</a:t>
             </a:r>
           </a:p>
           <a:p>
@@ -3480,7 +3480,7 @@
                 <a:ea typeface="Ebrima"/>
                 <a:cs typeface="Ebrima"/>
               </a:rPr>
-              <a:t>ታንሰፈስፈኛለህ (ወይ×6)</a:t>
+              <a:t>ታንሰፈስፈኛለህ ወይ×6</a:t>
             </a:r>
           </a:p>
         </p:txBody>
@@ -3547,7 +3547,7 @@
                 <a:ea typeface="Ebrima"/>
                 <a:cs typeface="Ebrima"/>
               </a:rPr>
-              <a:t>አንተ ልዩ ነህ ልዩ ነህ ለኔ (2)</a:t>
+              <a:t>አንተ ልዩ ነህ ልዩ ነህ ለኔ 2</a:t>
             </a:r>
           </a:p>
           <a:p>
@@ -3771,7 +3771,7 @@
                 <a:ea typeface="Ebrima"/>
                 <a:cs typeface="Ebrima"/>
               </a:rPr>
-              <a:t>ለእኔ ብርቄ ድንቄ ነህ (ወይ×6)</a:t>
+              <a:t>ለእኔ ብርቄ ድንቄ ነህ ወይ×6</a:t>
             </a:r>
           </a:p>
           <a:p>
@@ -3789,7 +3789,7 @@
                 <a:ea typeface="Ebrima"/>
                 <a:cs typeface="Ebrima"/>
               </a:rPr>
-              <a:t>ታንሰፈስፈኛለህ (ወይ×6)</a:t>
+              <a:t>ታንሰፈስፈኛለህ ወይ×6</a:t>
             </a:r>
           </a:p>
         </p:txBody>
@@ -3856,7 +3856,7 @@
                 <a:ea typeface="Ebrima"/>
                 <a:cs typeface="Ebrima"/>
               </a:rPr>
-              <a:t>አንተ ልዩ ነህ ልዩ ነህ ለኔ (2)</a:t>
+              <a:t>አንተ ልዩ ነህ ልዩ ነህ ለኔ 2</a:t>
             </a:r>
           </a:p>
           <a:p>
@@ -3959,7 +3959,7 @@
                 <a:ea typeface="Ebrima"/>
                 <a:cs typeface="Ebrima"/>
               </a:rPr>
-              <a:t>ልዩ ነህ ለኔ (2)</a:t>
+              <a:t>ልዩ ነህ ለኔ 2</a:t>
             </a:r>
           </a:p>
           <a:p>
@@ -4013,7 +4013,7 @@
                 <a:ea typeface="Ebrima"/>
                 <a:cs typeface="Ebrima"/>
               </a:rPr>
-              <a:t>ልዩ ነህ ለኔ (2)</a:t>
+              <a:t>ልዩ ነህ ለኔ 2</a:t>
             </a:r>
           </a:p>
         </p:txBody>
@@ -4201,7 +4201,7 @@
                 <a:ea typeface="Ebrima"/>
                 <a:cs typeface="Ebrima"/>
               </a:rPr>
-              <a:t>በህይወቴ (4)</a:t>
+              <a:t>በህይወቴ 4</a:t>
             </a:r>
           </a:p>
         </p:txBody>
@@ -4474,7 +4474,7 @@
                 <a:ea typeface="Ebrima"/>
                 <a:cs typeface="Ebrima"/>
               </a:rPr>
-              <a:t>በህይወቴ (4)</a:t>
+              <a:t>በህይወቴ 4</a:t>
             </a:r>
           </a:p>
         </p:txBody>
@@ -4747,7 +4747,7 @@
                 <a:ea typeface="Ebrima"/>
                 <a:cs typeface="Ebrima"/>
               </a:rPr>
-              <a:t>በህይወቴ (4)</a:t>
+              <a:t>በህይወቴ 4</a:t>
             </a:r>
           </a:p>
         </p:txBody>
